--- a/media/exports/reports/2025-12/growth-trades.pptx
+++ b/media/exports/reports/2025-12/growth-trades.pptx
@@ -219,49 +219,49 @@
                 <c:formatCode>$#,##0;[Red]($#,##0);"-"</c:formatCode>
                 <c:ptCount val="15"/>
                 <c:pt idx="0">
-                  <c:v>171009</c:v>
+                  <c:v>191014</c:v>
                 </c:pt>
                 <c:pt idx="1">
-                  <c:v>179474</c:v>
+                  <c:v>200124</c:v>
                 </c:pt>
                 <c:pt idx="2">
-                  <c:v>143156</c:v>
+                  <c:v>159406</c:v>
                 </c:pt>
                 <c:pt idx="3">
-                  <c:v>140909</c:v>
+                  <c:v>156794</c:v>
                 </c:pt>
                 <c:pt idx="4">
-                  <c:v>160943</c:v>
+                  <c:v>179190</c:v>
                 </c:pt>
                 <c:pt idx="5">
-                  <c:v>135082</c:v>
+                  <c:v>150465</c:v>
                 </c:pt>
                 <c:pt idx="6">
-                  <c:v>124705</c:v>
+                  <c:v>138865</c:v>
                 </c:pt>
                 <c:pt idx="7">
-                  <c:v>129816</c:v>
+                  <c:v>144649</c:v>
                 </c:pt>
                 <c:pt idx="8">
-                  <c:v>164113</c:v>
+                  <c:v>183265</c:v>
                 </c:pt>
                 <c:pt idx="9">
-                  <c:v>186760</c:v>
+                  <c:v>208588</c:v>
                 </c:pt>
                 <c:pt idx="10">
-                  <c:v>139164</c:v>
+                  <c:v>155118</c:v>
                 </c:pt>
                 <c:pt idx="11">
-                  <c:v>128255</c:v>
+                  <c:v>143077</c:v>
                 </c:pt>
                 <c:pt idx="12">
-                  <c:v>128898</c:v>
+                  <c:v>143566</c:v>
                 </c:pt>
                 <c:pt idx="13">
-                  <c:v>174786</c:v>
+                  <c:v>194966</c:v>
                 </c:pt>
                 <c:pt idx="14">
-                  <c:v>135079</c:v>
+                  <c:v>150283</c:v>
                 </c:pt>
               </c:numCache>
             </c:numRef>
@@ -310,7 +310,7 @@
         <c:axId val="-2100718248"/>
         <c:scaling>
           <c:orientation val="minMax"/>
-          <c:max val="200000.0"/>
+          <c:max val="250000.0"/>
           <c:min val="0.0"/>
         </c:scaling>
         <c:delete val="0"/>
@@ -477,49 +477,49 @@
                 <c:formatCode>$#,##0;[Red]($#,##0);"-"</c:formatCode>
                 <c:ptCount val="15"/>
                 <c:pt idx="0">
-                  <c:v>24670</c:v>
+                  <c:v>27650</c:v>
                 </c:pt>
                 <c:pt idx="1">
-                  <c:v>24670</c:v>
+                  <c:v>27650</c:v>
                 </c:pt>
                 <c:pt idx="2">
-                  <c:v>24670</c:v>
+                  <c:v>27650</c:v>
                 </c:pt>
                 <c:pt idx="3">
-                  <c:v>24670</c:v>
+                  <c:v>27650</c:v>
                 </c:pt>
                 <c:pt idx="4">
-                  <c:v>27930</c:v>
+                  <c:v>31300</c:v>
                 </c:pt>
                 <c:pt idx="5">
-                  <c:v>27930</c:v>
+                  <c:v>31300</c:v>
                 </c:pt>
                 <c:pt idx="6">
-                  <c:v>27930</c:v>
+                  <c:v>31300</c:v>
                 </c:pt>
                 <c:pt idx="7">
-                  <c:v>27930</c:v>
+                  <c:v>31300</c:v>
                 </c:pt>
                 <c:pt idx="8">
-                  <c:v>31870</c:v>
+                  <c:v>35720</c:v>
                 </c:pt>
                 <c:pt idx="9">
-                  <c:v>33200</c:v>
+                  <c:v>37200</c:v>
                 </c:pt>
                 <c:pt idx="10">
-                  <c:v>33200</c:v>
+                  <c:v>37200</c:v>
                 </c:pt>
                 <c:pt idx="11">
-                  <c:v>33200</c:v>
+                  <c:v>37200</c:v>
                 </c:pt>
                 <c:pt idx="12">
-                  <c:v>35800</c:v>
+                  <c:v>40100</c:v>
                 </c:pt>
                 <c:pt idx="13">
-                  <c:v>35800</c:v>
+                  <c:v>40100</c:v>
                 </c:pt>
                 <c:pt idx="14">
-                  <c:v>35800</c:v>
+                  <c:v>40100</c:v>
                 </c:pt>
               </c:numCache>
             </c:numRef>
@@ -568,7 +568,7 @@
         <c:axId val="-2100718248"/>
         <c:scaling>
           <c:orientation val="minMax"/>
-          <c:max val="40000.0"/>
+          <c:max val="50000.0"/>
           <c:min val="0.0"/>
         </c:scaling>
         <c:delete val="0"/>
@@ -735,49 +735,49 @@
                 <c:formatCode>$#,##0;[Red]($#,##0);"-"</c:formatCode>
                 <c:ptCount val="15"/>
                 <c:pt idx="0">
+                  <c:v>141600</c:v>
+                </c:pt>
+                <c:pt idx="1">
+                  <c:v>147100</c:v>
+                </c:pt>
+                <c:pt idx="2">
+                  <c:v>103700</c:v>
+                </c:pt>
+                <c:pt idx="3">
+                  <c:v>100100</c:v>
+                </c:pt>
+                <c:pt idx="4">
+                  <c:v>118600</c:v>
+                </c:pt>
+                <c:pt idx="5">
+                  <c:v>96400</c:v>
+                </c:pt>
+                <c:pt idx="6">
+                  <c:v>83900</c:v>
+                </c:pt>
+                <c:pt idx="7">
+                  <c:v>89900</c:v>
+                </c:pt>
+                <c:pt idx="8">
                   <c:v>126300</c:v>
                 </c:pt>
-                <c:pt idx="1">
-                  <c:v>131400</c:v>
-                </c:pt>
-                <c:pt idx="2">
-                  <c:v>92600</c:v>
-                </c:pt>
-                <c:pt idx="3">
-                  <c:v>89400</c:v>
-                </c:pt>
-                <c:pt idx="4">
-                  <c:v>106000</c:v>
-                </c:pt>
-                <c:pt idx="5">
-                  <c:v>86100</c:v>
-                </c:pt>
-                <c:pt idx="6">
-                  <c:v>74900</c:v>
-                </c:pt>
-                <c:pt idx="7">
-                  <c:v>80300</c:v>
-                </c:pt>
-                <c:pt idx="8">
-                  <c:v>112700</c:v>
-                </c:pt>
                 <c:pt idx="9">
-                  <c:v>135800</c:v>
+                  <c:v>152100</c:v>
                 </c:pt>
                 <c:pt idx="10">
-                  <c:v>86200</c:v>
+                  <c:v>96500</c:v>
                 </c:pt>
                 <c:pt idx="11">
-                  <c:v>75100</c:v>
+                  <c:v>84200</c:v>
                 </c:pt>
                 <c:pt idx="12">
-                  <c:v>70800</c:v>
+                  <c:v>79300</c:v>
                 </c:pt>
                 <c:pt idx="13">
-                  <c:v>113300</c:v>
+                  <c:v>126900</c:v>
                 </c:pt>
                 <c:pt idx="14">
-                  <c:v>69700</c:v>
+                  <c:v>78100</c:v>
                 </c:pt>
               </c:numCache>
             </c:numRef>
@@ -826,7 +826,7 @@
         <c:axId val="-2100718248"/>
         <c:scaling>
           <c:orientation val="minMax"/>
-          <c:max val="150000.0"/>
+          <c:max val="200000.0"/>
           <c:min val="0.0"/>
         </c:scaling>
         <c:delete val="0"/>
@@ -993,49 +993,49 @@
                 <c:formatCode>$#,##0;[Red]($#,##0);"-"</c:formatCode>
                 <c:ptCount val="15"/>
                 <c:pt idx="0">
-                  <c:v>20039</c:v>
+                  <c:v>21764</c:v>
                 </c:pt>
                 <c:pt idx="1">
-                  <c:v>23404</c:v>
+                  <c:v>25374</c:v>
                 </c:pt>
                 <c:pt idx="2">
-                  <c:v>25886</c:v>
+                  <c:v>28056</c:v>
                 </c:pt>
                 <c:pt idx="3">
-                  <c:v>26839</c:v>
+                  <c:v>29044</c:v>
                 </c:pt>
                 <c:pt idx="4">
-                  <c:v>27013</c:v>
+                  <c:v>29290</c:v>
                 </c:pt>
                 <c:pt idx="5">
-                  <c:v>21052</c:v>
+                  <c:v>22765</c:v>
                 </c:pt>
                 <c:pt idx="6">
-                  <c:v>21875</c:v>
+                  <c:v>23665</c:v>
                 </c:pt>
                 <c:pt idx="7">
-                  <c:v>21586</c:v>
+                  <c:v>23449</c:v>
                 </c:pt>
                 <c:pt idx="8">
-                  <c:v>19543</c:v>
+                  <c:v>21245</c:v>
                 </c:pt>
                 <c:pt idx="9">
-                  <c:v>17760</c:v>
+                  <c:v>19288</c:v>
                 </c:pt>
                 <c:pt idx="10">
-                  <c:v>19764</c:v>
+                  <c:v>21418</c:v>
                 </c:pt>
                 <c:pt idx="11">
-                  <c:v>19955</c:v>
+                  <c:v>21677</c:v>
                 </c:pt>
                 <c:pt idx="12">
-                  <c:v>22298</c:v>
+                  <c:v>24166</c:v>
                 </c:pt>
                 <c:pt idx="13">
-                  <c:v>25686</c:v>
+                  <c:v>27966</c:v>
                 </c:pt>
                 <c:pt idx="14">
-                  <c:v>29579</c:v>
+                  <c:v>32083</c:v>
                 </c:pt>
               </c:numCache>
             </c:numRef>
@@ -1609,7 +1609,7 @@
           <a:lstStyle/>
           <a:p>
             <a:r>
-              <a:t>Trades · All. December against December last year: (5.6%); Year to date (Jul to Dec 2025): $892,942; Gross margin, year to date: 37.4%. Revenue is $892,942 this financial year to date (Jul to Dec 2025). Maintenance contracts make the highest gross margin (59.5%); Installations the lowest (27.6%). The business needs 45.8% gross margin just to cover overheads. Installations: 27.6% gross margin, 7.4 points under the 35.0% target: about $40,735 on $550,900 of revenue this financial year to date. It's below the 45.8% needed to cover overheads, too. Maintenance contracts: 59.5% gross margin, 24.5 points over the 35.0% target ($50,664 ahead on $207,000 this financial year to date).</a:t>
+              <a:t>Trades · All. December against December last year: (5.7%); Year to date (Jul to Dec 2025): $995,598; Gross margin, year to date: 43.9%. Revenue is $995,598 this financial year to date (Jul to Dec 2025). Maintenance contracts make the highest gross margin (63.8%); Installations the lowest (35.4%). The business needs 53.3% gross margin just to cover overheads. Installations: 35.4% gross margin, 0.4 points over the 35.0% target ($2,295 ahead on $617,100 this financial year to date). Maintenance contracts: 63.8% gross margin, 28.8 points over the 35.0% target ($66,849 ahead on $231,900 this financial year to date).</a:t>
             </a:r>
           </a:p>
         </p:txBody>
@@ -1679,7 +1679,7 @@
           <a:lstStyle/>
           <a:p>
             <a:r>
-              <a:t>Trades · Maintenance contracts. December against December last year: 45.1%; Year to date (Jul to Dec 2025): $207,000; Gross margin, year to date: 59.5%. Maintenance contracts brought in $207,000 this financial year to date, at a 59.5% gross margin (above the 37.4% overall). Maintenance contracts: 59.5% gross margin, 24.5 points over the 35.0% target ($50,664 ahead on $207,000 this financial year to date).</a:t>
+              <a:t>Trades · Maintenance contracts. December against December last year: 45.0%; Year to date (Jul to Dec 2025): $231,900; Gross margin, year to date: 63.8%. Maintenance contracts brought in $231,900 this financial year to date, at a 63.8% gross margin (above the 43.9% overall). Maintenance contracts: 63.8% gross margin, 28.8 points over the 35.0% target ($66,849 ahead on $231,900 this financial year to date).</a:t>
             </a:r>
           </a:p>
         </p:txBody>
@@ -1749,7 +1749,7 @@
           <a:lstStyle/>
           <a:p>
             <a:r>
-              <a:t>Trades · Installations. December against December last year: (24.7%); Year to date (Jul to Dec 2025): $550,900; Gross margin, year to date: 27.6%. Installations brought in $550,900 this financial year to date, at a 27.6% gross margin (below the 37.4% overall). Installations: 27.6% gross margin, 7.4 points under the 35.0% target: about $40,735 on $550,900 of revenue this financial year to date. It's below the 45.8% needed to cover overheads, too.</a:t>
+              <a:t>Trades · Installations. December against December last year: (24.7%); Year to date (Jul to Dec 2025): $617,100; Gross margin, year to date: 35.4%. Installations brought in $617,100 this financial year to date, at a 35.4% gross margin (below the 43.9% overall). Installations: 35.4% gross margin, 0.4 points over the 35.0% target ($2,295 ahead on $617,100 this financial year to date).</a:t>
             </a:r>
           </a:p>
         </p:txBody>
@@ -1819,7 +1819,7 @@
           <a:lstStyle/>
           <a:p>
             <a:r>
-              <a:t>Trades · Call-outs and repairs. December against December last year: 14.3%; Year to date (Jul to Dec 2025): $135,042; Gross margin, year to date: 43.8%. Call-outs and repairs brought in $135,042 this financial year to date, at a 43.8% gross margin (above the 37.4% overall). Call-outs and repairs: 43.8% gross margin, 8.8 points over the 35.0% target ($11,825 ahead on $135,042 this financial year to date).</a:t>
+              <a:t>Trades · Call-outs and repairs. December against December last year: 14.4%; Year to date (Jul to Dec 2025): $146,598; Gross margin, year to date: 48.2%. Call-outs and repairs brought in $146,598 this financial year to date, at a 48.2% gross margin (above the 43.9% overall). Call-outs and repairs: 48.2% gross margin, 13.2 points over the 35.0% target ($19,337 ahead on $146,598 this financial year to date).</a:t>
             </a:r>
           </a:p>
         </p:txBody>
@@ -1889,7 +1889,7 @@
           <a:lstStyle/>
           <a:p>
             <a:r>
-              <a:t>By line: financial year to date (Jul to Dec 2025) against the same period last year · Trades. Same period last year: Not available: the data starts October 2024. From gross margin to profit: December's jobs made $50,453 gross margin (37.4%). Technician time not charged to jobs took $4,504 and overheads $57,350, leaving ($11,401) profit before tax ((8.4%) of revenue). To cover overheads, jobs need a 45.8% gross margin on average.</a:t>
+              <a:t>By line: financial year to date (Jul to Dec 2025) against the same period last year · Trades. Same period last year: Not available: the data starts October 2024. From gross margin to profit: December's jobs made $65,657 gross margin (43.7%). Technician time not charged to jobs took $22,821 and overheads $57,350, leaving ($14,514) profit before tax ((9.7%) of revenue). To cover overheads, jobs need a 53.3% gross margin on average.</a:t>
             </a:r>
           </a:p>
         </p:txBody>
@@ -5304,7 +5304,7 @@
                 </a:solidFill>
                 <a:latin typeface="Roboto"/>
               </a:rPr>
-              <a:t>Data retrieved 2pm, Tue 6 Oct 2026 · Generated 8 Oct 2026, 9:35am · Sample data · Made with Python (python-pptx)</a:t>
+              <a:t>Data retrieved 2pm, Tue 6 Oct 2026 · Generated 9 Oct 2026, 8:41am · Sample data · Made with Python (python-pptx)</a:t>
             </a:r>
           </a:p>
         </p:txBody>
@@ -5650,7 +5650,7 @@
                 </a:solidFill>
                 <a:latin typeface="Roboto"/>
               </a:rPr>
-              <a:t>(5.6%)</a:t>
+              <a:t>(5.7%)</a:t>
             </a:r>
           </a:p>
         </p:txBody>
@@ -5689,7 +5689,7 @@
                 </a:solidFill>
                 <a:latin typeface="Roboto"/>
               </a:rPr>
-              <a:t>$135,079 against $143,156</a:t>
+              <a:t>$150,283 against $159,406</a:t>
             </a:r>
           </a:p>
         </p:txBody>
@@ -5816,7 +5816,7 @@
                 </a:solidFill>
                 <a:latin typeface="Roboto"/>
               </a:rPr>
-              <a:t>$892,942</a:t>
+              <a:t>$995,598</a:t>
             </a:r>
           </a:p>
         </p:txBody>
@@ -5982,7 +5982,7 @@
                 </a:solidFill>
                 <a:latin typeface="Roboto"/>
               </a:rPr>
-              <a:t>37.4%</a:t>
+              <a:t>43.9%</a:t>
             </a:r>
           </a:p>
         </p:txBody>
@@ -6021,7 +6021,7 @@
                 </a:solidFill>
                 <a:latin typeface="Roboto"/>
               </a:rPr>
-              <a:t>$334,284 before overheads</a:t>
+              <a:t>$436,940 before overheads</a:t>
             </a:r>
           </a:p>
         </p:txBody>
@@ -6036,7 +6036,7 @@
         </p:nvGraphicFramePr>
         <p:xfrm>
           <a:off x="457200" y="2604516"/>
-          <a:ext cx="11277295" cy="2119884"/>
+          <a:ext cx="11277295" cy="2318004"/>
         </p:xfrm>
         <a:graphic>
           <a:graphicData uri="http://schemas.openxmlformats.org/drawingml/2006/chart">
@@ -6052,8 +6052,8 @@
         </p:nvSpPr>
         <p:spPr>
           <a:xfrm>
-            <a:off x="457200" y="4815840"/>
-            <a:ext cx="5501487" cy="1493520"/>
+            <a:off x="457200" y="5013960"/>
+            <a:ext cx="5501487" cy="1295400"/>
           </a:xfrm>
           <a:prstGeom prst="rect">
             <a:avLst/>
@@ -6101,7 +6101,7 @@
         </p:nvSpPr>
         <p:spPr>
           <a:xfrm>
-            <a:off x="594360" y="4870704"/>
+            <a:off x="594360" y="5068824"/>
             <a:ext cx="5227167" cy="274320"/>
           </a:xfrm>
           <a:prstGeom prst="rect">
@@ -6140,8 +6140,8 @@
         </p:nvSpPr>
         <p:spPr>
           <a:xfrm>
-            <a:off x="594360" y="5145024"/>
-            <a:ext cx="5227167" cy="1127760"/>
+            <a:off x="594360" y="5343144"/>
+            <a:ext cx="5227167" cy="929640"/>
           </a:xfrm>
           <a:prstGeom prst="rect">
             <a:avLst/>
@@ -6166,7 +6166,7 @@
                 </a:solidFill>
                 <a:latin typeface="Roboto"/>
               </a:rPr>
-              <a:t>Revenue is $892,942 this financial year to date (Jul to Dec 2025). Maintenance contracts make the highest gross margin (59.5%); Installations the lowest (27.6%). The business needs 45.8% gross margin just to cover overheads.</a:t>
+              <a:t>Revenue is $995,598 this financial year to date (Jul to Dec 2025). Maintenance contracts make the highest gross margin (63.8%); Installations the lowest (35.4%). The business needs 53.3% gross margin just to cover overheads.</a:t>
             </a:r>
           </a:p>
         </p:txBody>
@@ -6179,8 +6179,8 @@
         </p:nvSpPr>
         <p:spPr>
           <a:xfrm>
-            <a:off x="6233007" y="4815840"/>
-            <a:ext cx="5501487" cy="1493520"/>
+            <a:off x="6233007" y="5013960"/>
+            <a:ext cx="5501487" cy="1295400"/>
           </a:xfrm>
           <a:prstGeom prst="rect">
             <a:avLst/>
@@ -6228,7 +6228,7 @@
         </p:nvSpPr>
         <p:spPr>
           <a:xfrm>
-            <a:off x="6370167" y="4870704"/>
+            <a:off x="6370167" y="5068824"/>
             <a:ext cx="5227167" cy="274320"/>
           </a:xfrm>
           <a:prstGeom prst="rect">
@@ -6267,8 +6267,8 @@
         </p:nvSpPr>
         <p:spPr>
           <a:xfrm>
-            <a:off x="6370167" y="5145024"/>
-            <a:ext cx="5227167" cy="1127760"/>
+            <a:off x="6370167" y="5343144"/>
+            <a:ext cx="5227167" cy="929640"/>
           </a:xfrm>
           <a:prstGeom prst="rect">
             <a:avLst/>
@@ -6293,7 +6293,7 @@
                 </a:solidFill>
                 <a:latin typeface="Roboto"/>
               </a:rPr>
-              <a:t>Installations: 27.6% gross margin, 7.4 points under the 35.0% target: about $40,735 on $550,900 of revenue this financial year to date. It's below the 45.8% needed to cover overheads, too. Maintenance contracts: 59.5% gross margin, 24.5 points over the 35.0% target ($50,664 ahead on $207,000 this financial year to date).</a:t>
+              <a:t>Installations: 35.4% gross margin, 0.4 points over the 35.0% target ($2,295 ahead on $617,100 this financial year to date). Maintenance contracts: 63.8% gross margin, 28.8 points over the 35.0% target ($66,849 ahead on $231,900 this financial year to date).</a:t>
             </a:r>
           </a:p>
         </p:txBody>
@@ -6371,7 +6371,7 @@
                 </a:solidFill>
                 <a:latin typeface="Roboto"/>
               </a:rPr>
-              <a:t>Data retrieved 2pm, Tue 6 Oct 2026 · Generated 8 Oct 2026, 9:35am · Sample data · Made with Python (python-pptx)</a:t>
+              <a:t>Data retrieved 2pm, Tue 6 Oct 2026 · Generated 9 Oct 2026, 8:41am · Sample data · Made with Python (python-pptx)</a:t>
             </a:r>
           </a:p>
         </p:txBody>
@@ -6717,7 +6717,7 @@
                 </a:solidFill>
                 <a:latin typeface="Roboto"/>
               </a:rPr>
-              <a:t>45.1%</a:t>
+              <a:t>45.0%</a:t>
             </a:r>
           </a:p>
         </p:txBody>
@@ -6756,7 +6756,7 @@
                 </a:solidFill>
                 <a:latin typeface="Roboto"/>
               </a:rPr>
-              <a:t>$35,800 against $24,670</a:t>
+              <a:t>$40,100 against $27,650</a:t>
             </a:r>
           </a:p>
         </p:txBody>
@@ -6883,7 +6883,7 @@
                 </a:solidFill>
                 <a:latin typeface="Roboto"/>
               </a:rPr>
-              <a:t>$207,000</a:t>
+              <a:t>$231,900</a:t>
             </a:r>
           </a:p>
         </p:txBody>
@@ -7049,7 +7049,7 @@
                 </a:solidFill>
                 <a:latin typeface="Roboto"/>
               </a:rPr>
-              <a:t>59.5%</a:t>
+              <a:t>63.8%</a:t>
             </a:r>
           </a:p>
         </p:txBody>
@@ -7088,7 +7088,7 @@
                 </a:solidFill>
                 <a:latin typeface="Roboto"/>
               </a:rPr>
-              <a:t>$123,114 before overheads</a:t>
+              <a:t>$148,014 before overheads</a:t>
             </a:r>
           </a:p>
         </p:txBody>
@@ -7233,7 +7233,7 @@
                 </a:solidFill>
                 <a:latin typeface="Roboto"/>
               </a:rPr>
-              <a:t>Maintenance contracts brought in $207,000 this financial year to date, at a 59.5% gross margin (above the 37.4% overall).</a:t>
+              <a:t>Maintenance contracts brought in $231,900 this financial year to date, at a 63.8% gross margin (above the 43.9% overall).</a:t>
             </a:r>
           </a:p>
         </p:txBody>
@@ -7360,7 +7360,7 @@
                 </a:solidFill>
                 <a:latin typeface="Roboto"/>
               </a:rPr>
-              <a:t>Maintenance contracts: 59.5% gross margin, 24.5 points over the 35.0% target ($50,664 ahead on $207,000 this financial year to date).</a:t>
+              <a:t>Maintenance contracts: 63.8% gross margin, 28.8 points over the 35.0% target ($66,849 ahead on $231,900 this financial year to date).</a:t>
             </a:r>
           </a:p>
         </p:txBody>
@@ -7438,7 +7438,7 @@
                 </a:solidFill>
                 <a:latin typeface="Roboto"/>
               </a:rPr>
-              <a:t>Data retrieved 2pm, Tue 6 Oct 2026 · Generated 8 Oct 2026, 9:35am · Sample data · Made with Python (python-pptx)</a:t>
+              <a:t>Data retrieved 2pm, Tue 6 Oct 2026 · Generated 9 Oct 2026, 8:41am · Sample data · Made with Python (python-pptx)</a:t>
             </a:r>
           </a:p>
         </p:txBody>
@@ -7823,7 +7823,7 @@
                 </a:solidFill>
                 <a:latin typeface="Roboto"/>
               </a:rPr>
-              <a:t>$69,700 against $92,600</a:t>
+              <a:t>$78,100 against $103,700</a:t>
             </a:r>
           </a:p>
         </p:txBody>
@@ -7950,7 +7950,7 @@
                 </a:solidFill>
                 <a:latin typeface="Roboto"/>
               </a:rPr>
-              <a:t>$550,900</a:t>
+              <a:t>$617,100</a:t>
             </a:r>
           </a:p>
         </p:txBody>
@@ -8116,7 +8116,7 @@
                 </a:solidFill>
                 <a:latin typeface="Roboto"/>
               </a:rPr>
-              <a:t>27.6%</a:t>
+              <a:t>35.4%</a:t>
             </a:r>
           </a:p>
         </p:txBody>
@@ -8155,7 +8155,7 @@
                 </a:solidFill>
                 <a:latin typeface="Roboto"/>
               </a:rPr>
-              <a:t>$152,080 before overheads</a:t>
+              <a:t>$218,280 before overheads</a:t>
             </a:r>
           </a:p>
         </p:txBody>
@@ -8170,7 +8170,7 @@
         </p:nvGraphicFramePr>
         <p:xfrm>
           <a:off x="457200" y="2604516"/>
-          <a:ext cx="11277295" cy="2516124"/>
+          <a:ext cx="11277295" cy="2714244"/>
         </p:xfrm>
         <a:graphic>
           <a:graphicData uri="http://schemas.openxmlformats.org/drawingml/2006/chart">
@@ -8186,8 +8186,8 @@
         </p:nvSpPr>
         <p:spPr>
           <a:xfrm>
-            <a:off x="457200" y="5212080"/>
-            <a:ext cx="5501487" cy="1097280"/>
+            <a:off x="457200" y="5410200"/>
+            <a:ext cx="5501487" cy="899160"/>
           </a:xfrm>
           <a:prstGeom prst="rect">
             <a:avLst/>
@@ -8235,7 +8235,7 @@
         </p:nvSpPr>
         <p:spPr>
           <a:xfrm>
-            <a:off x="594360" y="5266944"/>
+            <a:off x="594360" y="5465064"/>
             <a:ext cx="5227167" cy="274320"/>
           </a:xfrm>
           <a:prstGeom prst="rect">
@@ -8274,8 +8274,8 @@
         </p:nvSpPr>
         <p:spPr>
           <a:xfrm>
-            <a:off x="594360" y="5541264"/>
-            <a:ext cx="5227167" cy="731520"/>
+            <a:off x="594360" y="5739384"/>
+            <a:ext cx="5227167" cy="533400"/>
           </a:xfrm>
           <a:prstGeom prst="rect">
             <a:avLst/>
@@ -8300,7 +8300,7 @@
                 </a:solidFill>
                 <a:latin typeface="Roboto"/>
               </a:rPr>
-              <a:t>Installations brought in $550,900 this financial year to date, at a 27.6% gross margin (below the 37.4% overall).</a:t>
+              <a:t>Installations brought in $617,100 this financial year to date, at a 35.4% gross margin (below the 43.9% overall).</a:t>
             </a:r>
           </a:p>
         </p:txBody>
@@ -8313,8 +8313,8 @@
         </p:nvSpPr>
         <p:spPr>
           <a:xfrm>
-            <a:off x="6233007" y="5212080"/>
-            <a:ext cx="5501487" cy="1097280"/>
+            <a:off x="6233007" y="5410200"/>
+            <a:ext cx="5501487" cy="899160"/>
           </a:xfrm>
           <a:prstGeom prst="rect">
             <a:avLst/>
@@ -8362,7 +8362,7 @@
         </p:nvSpPr>
         <p:spPr>
           <a:xfrm>
-            <a:off x="6370167" y="5266944"/>
+            <a:off x="6370167" y="5465064"/>
             <a:ext cx="5227167" cy="274320"/>
           </a:xfrm>
           <a:prstGeom prst="rect">
@@ -8401,8 +8401,8 @@
         </p:nvSpPr>
         <p:spPr>
           <a:xfrm>
-            <a:off x="6370167" y="5541264"/>
-            <a:ext cx="5227167" cy="731520"/>
+            <a:off x="6370167" y="5739384"/>
+            <a:ext cx="5227167" cy="533400"/>
           </a:xfrm>
           <a:prstGeom prst="rect">
             <a:avLst/>
@@ -8427,7 +8427,7 @@
                 </a:solidFill>
                 <a:latin typeface="Roboto"/>
               </a:rPr>
-              <a:t>Installations: 27.6% gross margin, 7.4 points under the 35.0% target: about $40,735 on $550,900 of revenue this financial year to date. It's below the 45.8% needed to cover overheads, too.</a:t>
+              <a:t>Installations: 35.4% gross margin, 0.4 points over the 35.0% target ($2,295 ahead on $617,100 this financial year to date).</a:t>
             </a:r>
           </a:p>
         </p:txBody>
@@ -8505,7 +8505,7 @@
                 </a:solidFill>
                 <a:latin typeface="Roboto"/>
               </a:rPr>
-              <a:t>Data retrieved 2pm, Tue 6 Oct 2026 · Generated 8 Oct 2026, 9:35am · Sample data · Made with Python (python-pptx)</a:t>
+              <a:t>Data retrieved 2pm, Tue 6 Oct 2026 · Generated 9 Oct 2026, 8:41am · Sample data · Made with Python (python-pptx)</a:t>
             </a:r>
           </a:p>
         </p:txBody>
@@ -8851,7 +8851,7 @@
                 </a:solidFill>
                 <a:latin typeface="Roboto"/>
               </a:rPr>
-              <a:t>14.3%</a:t>
+              <a:t>14.4%</a:t>
             </a:r>
           </a:p>
         </p:txBody>
@@ -8890,7 +8890,7 @@
                 </a:solidFill>
                 <a:latin typeface="Roboto"/>
               </a:rPr>
-              <a:t>$29,579 against $25,886</a:t>
+              <a:t>$32,083 against $28,056</a:t>
             </a:r>
           </a:p>
         </p:txBody>
@@ -9017,7 +9017,7 @@
                 </a:solidFill>
                 <a:latin typeface="Roboto"/>
               </a:rPr>
-              <a:t>$135,042</a:t>
+              <a:t>$146,598</a:t>
             </a:r>
           </a:p>
         </p:txBody>
@@ -9183,7 +9183,7 @@
                 </a:solidFill>
                 <a:latin typeface="Roboto"/>
               </a:rPr>
-              <a:t>43.8%</a:t>
+              <a:t>48.2%</a:t>
             </a:r>
           </a:p>
         </p:txBody>
@@ -9222,7 +9222,7 @@
                 </a:solidFill>
                 <a:latin typeface="Roboto"/>
               </a:rPr>
-              <a:t>$59,090 before overheads</a:t>
+              <a:t>$70,646 before overheads</a:t>
             </a:r>
           </a:p>
         </p:txBody>
@@ -9367,7 +9367,7 @@
                 </a:solidFill>
                 <a:latin typeface="Roboto"/>
               </a:rPr>
-              <a:t>Call-outs and repairs brought in $135,042 this financial year to date, at a 43.8% gross margin (above the 37.4% overall).</a:t>
+              <a:t>Call-outs and repairs brought in $146,598 this financial year to date, at a 48.2% gross margin (above the 43.9% overall).</a:t>
             </a:r>
           </a:p>
         </p:txBody>
@@ -9494,7 +9494,7 @@
                 </a:solidFill>
                 <a:latin typeface="Roboto"/>
               </a:rPr>
-              <a:t>Call-outs and repairs: 43.8% gross margin, 8.8 points over the 35.0% target ($11,825 ahead on $135,042 this financial year to date).</a:t>
+              <a:t>Call-outs and repairs: 48.2% gross margin, 13.2 points over the 35.0% target ($19,337 ahead on $146,598 this financial year to date).</a:t>
             </a:r>
           </a:p>
         </p:txBody>
@@ -9572,7 +9572,7 @@
                 </a:solidFill>
                 <a:latin typeface="Roboto"/>
               </a:rPr>
-              <a:t>Data retrieved 2pm, Tue 6 Oct 2026 · Generated 8 Oct 2026, 9:35am · Sample data · Made with Python (python-pptx)</a:t>
+              <a:t>Data retrieved 2pm, Tue 6 Oct 2026 · Generated 9 Oct 2026, 8:41am · Sample data · Made with Python (python-pptx)</a:t>
             </a:r>
           </a:p>
         </p:txBody>
@@ -9791,7 +9791,7 @@
                 </a:solidFill>
                 <a:latin typeface="Roboto"/>
               </a:rPr>
-              <a:t>Same period last year: Not available: the data starts October 2024. From gross margin to profit: December's jobs made $50,453 gross margin (37.4%). Technician time not charged to jobs took $4,504 and overheads $57,350, leaving ($11,401) profit before tax ((8.4%) of revenue). To cover overheads, jobs need a 45.8% gross margin on average.</a:t>
+              <a:t>Same period last year: Not available: the data starts October 2024. From gross margin to profit: December's jobs made $65,657 gross margin (43.7%). Technician time not charged to jobs took $22,821 and overheads $57,350, leaving ($14,514) profit before tax ((9.7%) of revenue). To cover overheads, jobs need a 53.3% gross margin on average.</a:t>
             </a:r>
           </a:p>
         </p:txBody>
@@ -10022,7 +10022,7 @@
                           </a:solidFill>
                           <a:latin typeface="Roboto"/>
                         </a:rPr>
-                        <a:t>$207,000</a:t>
+                        <a:t>$231,900</a:t>
                       </a:r>
                     </a:p>
                   </a:txBody>
@@ -10103,7 +10103,7 @@
                           </a:solidFill>
                           <a:latin typeface="Roboto"/>
                         </a:rPr>
-                        <a:t>$123,114</a:t>
+                        <a:t>$148,014</a:t>
                       </a:r>
                     </a:p>
                   </a:txBody>
@@ -10130,7 +10130,7 @@
                           </a:solidFill>
                           <a:latin typeface="Roboto"/>
                         </a:rPr>
-                        <a:t>59.5%</a:t>
+                        <a:t>63.8%</a:t>
                       </a:r>
                     </a:p>
                   </a:txBody>
@@ -10186,7 +10186,7 @@
                           </a:solidFill>
                           <a:latin typeface="Roboto"/>
                         </a:rPr>
-                        <a:t>$550,900</a:t>
+                        <a:t>$617,100</a:t>
                       </a:r>
                     </a:p>
                   </a:txBody>
@@ -10267,7 +10267,7 @@
                           </a:solidFill>
                           <a:latin typeface="Roboto"/>
                         </a:rPr>
-                        <a:t>$152,080</a:t>
+                        <a:t>$218,280</a:t>
                       </a:r>
                     </a:p>
                   </a:txBody>
@@ -10294,7 +10294,7 @@
                           </a:solidFill>
                           <a:latin typeface="Roboto"/>
                         </a:rPr>
-                        <a:t>27.6%</a:t>
+                        <a:t>35.4%</a:t>
                       </a:r>
                     </a:p>
                   </a:txBody>
@@ -10350,7 +10350,7 @@
                           </a:solidFill>
                           <a:latin typeface="Roboto"/>
                         </a:rPr>
-                        <a:t>$135,042</a:t>
+                        <a:t>$146,598</a:t>
                       </a:r>
                     </a:p>
                   </a:txBody>
@@ -10431,7 +10431,7 @@
                           </a:solidFill>
                           <a:latin typeface="Roboto"/>
                         </a:rPr>
-                        <a:t>$59,090</a:t>
+                        <a:t>$70,646</a:t>
                       </a:r>
                     </a:p>
                   </a:txBody>
@@ -10458,7 +10458,7 @@
                           </a:solidFill>
                           <a:latin typeface="Roboto"/>
                         </a:rPr>
-                        <a:t>43.8%</a:t>
+                        <a:t>48.2%</a:t>
                       </a:r>
                     </a:p>
                   </a:txBody>
@@ -10514,7 +10514,7 @@
                           </a:solidFill>
                           <a:latin typeface="Roboto"/>
                         </a:rPr>
-                        <a:t>$892,942</a:t>
+                        <a:t>$995,598</a:t>
                       </a:r>
                     </a:p>
                   </a:txBody>
@@ -10595,7 +10595,7 @@
                           </a:solidFill>
                           <a:latin typeface="Roboto"/>
                         </a:rPr>
-                        <a:t>$334,284</a:t>
+                        <a:t>$436,940</a:t>
                       </a:r>
                     </a:p>
                   </a:txBody>
@@ -10622,7 +10622,7 @@
                           </a:solidFill>
                           <a:latin typeface="Roboto"/>
                         </a:rPr>
-                        <a:t>37.4%</a:t>
+                        <a:t>43.9%</a:t>
                       </a:r>
                     </a:p>
                   </a:txBody>
@@ -10710,7 +10710,7 @@
                 </a:solidFill>
                 <a:latin typeface="Roboto"/>
               </a:rPr>
-              <a:t>Data retrieved 2pm, Tue 6 Oct 2026 · Generated 8 Oct 2026, 9:35am · Sample data · Made with Python (python-pptx)</a:t>
+              <a:t>Data retrieved 2pm, Tue 6 Oct 2026 · Generated 9 Oct 2026, 8:41am · Sample data · Made with Python (python-pptx)</a:t>
             </a:r>
           </a:p>
         </p:txBody>
